--- a/在你殿中.pptx
+++ b/在你殿中.pptx
@@ -111,6 +111,11 @@
       </a:defRPr>
     </a:lvl9pPr>
   </p:defaultTextStyle>
+  <p:extLst>
+    <p:ext uri="{EFAFB233-063F-42B5-8137-9DF3F51BA10A}">
+      <p15:sldGuideLst xmlns:p15="http://schemas.microsoft.com/office/powerpoint/2012/main"/>
+    </p:ext>
+  </p:extLst>
 </p:presentation>
 </file>
 
@@ -152,7 +157,7 @@
           <a:lstStyle/>
           <a:p>
             <a:r>
-              <a:rPr lang="en-US" altLang="zh-TW" smtClean="0"/>
+              <a:rPr lang="en-US" altLang="zh-TW"/>
               <a:t>Click to edit Master title style</a:t>
             </a:r>
             <a:endParaRPr lang="zh-TW" altLang="en-US"/>
@@ -271,7 +276,7 @@
           </a:lstStyle>
           <a:p>
             <a:r>
-              <a:rPr lang="en-US" altLang="zh-TW" smtClean="0"/>
+              <a:rPr lang="en-US" altLang="zh-TW"/>
               <a:t>Click to edit Master subtitle style</a:t>
             </a:r>
             <a:endParaRPr lang="zh-TW" altLang="en-US"/>
@@ -295,7 +300,7 @@
           <a:p>
             <a:fld id="{DC17EE48-43D4-4F7F-A2E8-50E0E7942536}" type="datetimeFigureOut">
               <a:rPr lang="vi-VN" smtClean="0"/>
-              <a:t>01/10/2022</a:t>
+              <a:t>23/11/2024</a:t>
             </a:fld>
             <a:endParaRPr lang="vi-VN"/>
           </a:p>
@@ -389,7 +394,7 @@
           <a:lstStyle/>
           <a:p>
             <a:r>
-              <a:rPr lang="en-US" altLang="zh-TW" smtClean="0"/>
+              <a:rPr lang="en-US" altLang="zh-TW"/>
               <a:t>Click to edit Master title style</a:t>
             </a:r>
             <a:endParaRPr lang="zh-TW" altLang="en-US"/>
@@ -413,35 +418,35 @@
           <a:p>
             <a:pPr lvl="0"/>
             <a:r>
-              <a:rPr lang="en-US" altLang="zh-TW" smtClean="0"/>
+              <a:rPr lang="en-US" altLang="zh-TW"/>
               <a:t>Edit Master text styles</a:t>
             </a:r>
           </a:p>
           <a:p>
             <a:pPr lvl="1"/>
             <a:r>
-              <a:rPr lang="en-US" altLang="zh-TW" smtClean="0"/>
+              <a:rPr lang="en-US" altLang="zh-TW"/>
               <a:t>Second level</a:t>
             </a:r>
           </a:p>
           <a:p>
             <a:pPr lvl="2"/>
             <a:r>
-              <a:rPr lang="en-US" altLang="zh-TW" smtClean="0"/>
+              <a:rPr lang="en-US" altLang="zh-TW"/>
               <a:t>Third level</a:t>
             </a:r>
           </a:p>
           <a:p>
             <a:pPr lvl="3"/>
             <a:r>
-              <a:rPr lang="en-US" altLang="zh-TW" smtClean="0"/>
+              <a:rPr lang="en-US" altLang="zh-TW"/>
               <a:t>Fourth level</a:t>
             </a:r>
           </a:p>
           <a:p>
             <a:pPr lvl="4"/>
             <a:r>
-              <a:rPr lang="en-US" altLang="zh-TW" smtClean="0"/>
+              <a:rPr lang="en-US" altLang="zh-TW"/>
               <a:t>Fifth level</a:t>
             </a:r>
             <a:endParaRPr lang="zh-TW" altLang="en-US"/>
@@ -465,7 +470,7 @@
           <a:p>
             <a:fld id="{DC17EE48-43D4-4F7F-A2E8-50E0E7942536}" type="datetimeFigureOut">
               <a:rPr lang="vi-VN" smtClean="0"/>
-              <a:t>01/10/2022</a:t>
+              <a:t>23/11/2024</a:t>
             </a:fld>
             <a:endParaRPr lang="vi-VN"/>
           </a:p>
@@ -564,7 +569,7 @@
           <a:lstStyle/>
           <a:p>
             <a:r>
-              <a:rPr lang="en-US" altLang="zh-TW" smtClean="0"/>
+              <a:rPr lang="en-US" altLang="zh-TW"/>
               <a:t>Click to edit Master title style</a:t>
             </a:r>
             <a:endParaRPr lang="zh-TW" altLang="en-US"/>
@@ -593,35 +598,35 @@
           <a:p>
             <a:pPr lvl="0"/>
             <a:r>
-              <a:rPr lang="en-US" altLang="zh-TW" smtClean="0"/>
+              <a:rPr lang="en-US" altLang="zh-TW"/>
               <a:t>Edit Master text styles</a:t>
             </a:r>
           </a:p>
           <a:p>
             <a:pPr lvl="1"/>
             <a:r>
-              <a:rPr lang="en-US" altLang="zh-TW" smtClean="0"/>
+              <a:rPr lang="en-US" altLang="zh-TW"/>
               <a:t>Second level</a:t>
             </a:r>
           </a:p>
           <a:p>
             <a:pPr lvl="2"/>
             <a:r>
-              <a:rPr lang="en-US" altLang="zh-TW" smtClean="0"/>
+              <a:rPr lang="en-US" altLang="zh-TW"/>
               <a:t>Third level</a:t>
             </a:r>
           </a:p>
           <a:p>
             <a:pPr lvl="3"/>
             <a:r>
-              <a:rPr lang="en-US" altLang="zh-TW" smtClean="0"/>
+              <a:rPr lang="en-US" altLang="zh-TW"/>
               <a:t>Fourth level</a:t>
             </a:r>
           </a:p>
           <a:p>
             <a:pPr lvl="4"/>
             <a:r>
-              <a:rPr lang="en-US" altLang="zh-TW" smtClean="0"/>
+              <a:rPr lang="en-US" altLang="zh-TW"/>
               <a:t>Fifth level</a:t>
             </a:r>
             <a:endParaRPr lang="zh-TW" altLang="en-US"/>
@@ -645,7 +650,7 @@
           <a:p>
             <a:fld id="{DC17EE48-43D4-4F7F-A2E8-50E0E7942536}" type="datetimeFigureOut">
               <a:rPr lang="vi-VN" smtClean="0"/>
-              <a:t>01/10/2022</a:t>
+              <a:t>23/11/2024</a:t>
             </a:fld>
             <a:endParaRPr lang="vi-VN"/>
           </a:p>
@@ -739,7 +744,7 @@
           <a:lstStyle/>
           <a:p>
             <a:r>
-              <a:rPr lang="en-US" altLang="zh-TW" smtClean="0"/>
+              <a:rPr lang="en-US" altLang="zh-TW"/>
               <a:t>Click to edit Master title style</a:t>
             </a:r>
             <a:endParaRPr lang="zh-TW" altLang="en-US"/>
@@ -763,35 +768,35 @@
           <a:p>
             <a:pPr lvl="0"/>
             <a:r>
-              <a:rPr lang="en-US" altLang="zh-TW" smtClean="0"/>
+              <a:rPr lang="en-US" altLang="zh-TW"/>
               <a:t>Edit Master text styles</a:t>
             </a:r>
           </a:p>
           <a:p>
             <a:pPr lvl="1"/>
             <a:r>
-              <a:rPr lang="en-US" altLang="zh-TW" smtClean="0"/>
+              <a:rPr lang="en-US" altLang="zh-TW"/>
               <a:t>Second level</a:t>
             </a:r>
           </a:p>
           <a:p>
             <a:pPr lvl="2"/>
             <a:r>
-              <a:rPr lang="en-US" altLang="zh-TW" smtClean="0"/>
+              <a:rPr lang="en-US" altLang="zh-TW"/>
               <a:t>Third level</a:t>
             </a:r>
           </a:p>
           <a:p>
             <a:pPr lvl="3"/>
             <a:r>
-              <a:rPr lang="en-US" altLang="zh-TW" smtClean="0"/>
+              <a:rPr lang="en-US" altLang="zh-TW"/>
               <a:t>Fourth level</a:t>
             </a:r>
           </a:p>
           <a:p>
             <a:pPr lvl="4"/>
             <a:r>
-              <a:rPr lang="en-US" altLang="zh-TW" smtClean="0"/>
+              <a:rPr lang="en-US" altLang="zh-TW"/>
               <a:t>Fifth level</a:t>
             </a:r>
             <a:endParaRPr lang="zh-TW" altLang="en-US"/>
@@ -815,7 +820,7 @@
           <a:p>
             <a:fld id="{DC17EE48-43D4-4F7F-A2E8-50E0E7942536}" type="datetimeFigureOut">
               <a:rPr lang="vi-VN" smtClean="0"/>
-              <a:t>01/10/2022</a:t>
+              <a:t>23/11/2024</a:t>
             </a:fld>
             <a:endParaRPr lang="vi-VN"/>
           </a:p>
@@ -918,7 +923,7 @@
           </a:lstStyle>
           <a:p>
             <a:r>
-              <a:rPr lang="en-US" altLang="zh-TW" smtClean="0"/>
+              <a:rPr lang="en-US" altLang="zh-TW"/>
               <a:t>Click to edit Master title style</a:t>
             </a:r>
             <a:endParaRPr lang="zh-TW" altLang="en-US"/>
@@ -1038,7 +1043,7 @@
           <a:p>
             <a:pPr lvl="0"/>
             <a:r>
-              <a:rPr lang="en-US" altLang="zh-TW" smtClean="0"/>
+              <a:rPr lang="en-US" altLang="zh-TW"/>
               <a:t>Edit Master text styles</a:t>
             </a:r>
           </a:p>
@@ -1061,7 +1066,7 @@
           <a:p>
             <a:fld id="{DC17EE48-43D4-4F7F-A2E8-50E0E7942536}" type="datetimeFigureOut">
               <a:rPr lang="vi-VN" smtClean="0"/>
-              <a:t>01/10/2022</a:t>
+              <a:t>23/11/2024</a:t>
             </a:fld>
             <a:endParaRPr lang="vi-VN"/>
           </a:p>
@@ -1155,7 +1160,7 @@
           <a:lstStyle/>
           <a:p>
             <a:r>
-              <a:rPr lang="en-US" altLang="zh-TW" smtClean="0"/>
+              <a:rPr lang="en-US" altLang="zh-TW"/>
               <a:t>Click to edit Master title style</a:t>
             </a:r>
             <a:endParaRPr lang="zh-TW" altLang="en-US"/>
@@ -1212,35 +1217,35 @@
           <a:p>
             <a:pPr lvl="0"/>
             <a:r>
-              <a:rPr lang="en-US" altLang="zh-TW" smtClean="0"/>
+              <a:rPr lang="en-US" altLang="zh-TW"/>
               <a:t>Edit Master text styles</a:t>
             </a:r>
           </a:p>
           <a:p>
             <a:pPr lvl="1"/>
             <a:r>
-              <a:rPr lang="en-US" altLang="zh-TW" smtClean="0"/>
+              <a:rPr lang="en-US" altLang="zh-TW"/>
               <a:t>Second level</a:t>
             </a:r>
           </a:p>
           <a:p>
             <a:pPr lvl="2"/>
             <a:r>
-              <a:rPr lang="en-US" altLang="zh-TW" smtClean="0"/>
+              <a:rPr lang="en-US" altLang="zh-TW"/>
               <a:t>Third level</a:t>
             </a:r>
           </a:p>
           <a:p>
             <a:pPr lvl="3"/>
             <a:r>
-              <a:rPr lang="en-US" altLang="zh-TW" smtClean="0"/>
+              <a:rPr lang="en-US" altLang="zh-TW"/>
               <a:t>Fourth level</a:t>
             </a:r>
           </a:p>
           <a:p>
             <a:pPr lvl="4"/>
             <a:r>
-              <a:rPr lang="en-US" altLang="zh-TW" smtClean="0"/>
+              <a:rPr lang="en-US" altLang="zh-TW"/>
               <a:t>Fifth level</a:t>
             </a:r>
             <a:endParaRPr lang="zh-TW" altLang="en-US"/>
@@ -1297,35 +1302,35 @@
           <a:p>
             <a:pPr lvl="0"/>
             <a:r>
-              <a:rPr lang="en-US" altLang="zh-TW" smtClean="0"/>
+              <a:rPr lang="en-US" altLang="zh-TW"/>
               <a:t>Edit Master text styles</a:t>
             </a:r>
           </a:p>
           <a:p>
             <a:pPr lvl="1"/>
             <a:r>
-              <a:rPr lang="en-US" altLang="zh-TW" smtClean="0"/>
+              <a:rPr lang="en-US" altLang="zh-TW"/>
               <a:t>Second level</a:t>
             </a:r>
           </a:p>
           <a:p>
             <a:pPr lvl="2"/>
             <a:r>
-              <a:rPr lang="en-US" altLang="zh-TW" smtClean="0"/>
+              <a:rPr lang="en-US" altLang="zh-TW"/>
               <a:t>Third level</a:t>
             </a:r>
           </a:p>
           <a:p>
             <a:pPr lvl="3"/>
             <a:r>
-              <a:rPr lang="en-US" altLang="zh-TW" smtClean="0"/>
+              <a:rPr lang="en-US" altLang="zh-TW"/>
               <a:t>Fourth level</a:t>
             </a:r>
           </a:p>
           <a:p>
             <a:pPr lvl="4"/>
             <a:r>
-              <a:rPr lang="en-US" altLang="zh-TW" smtClean="0"/>
+              <a:rPr lang="en-US" altLang="zh-TW"/>
               <a:t>Fifth level</a:t>
             </a:r>
             <a:endParaRPr lang="zh-TW" altLang="en-US"/>
@@ -1349,7 +1354,7 @@
           <a:p>
             <a:fld id="{DC17EE48-43D4-4F7F-A2E8-50E0E7942536}" type="datetimeFigureOut">
               <a:rPr lang="vi-VN" smtClean="0"/>
-              <a:t>01/10/2022</a:t>
+              <a:t>23/11/2024</a:t>
             </a:fld>
             <a:endParaRPr lang="vi-VN"/>
           </a:p>
@@ -1447,7 +1452,7 @@
           </a:lstStyle>
           <a:p>
             <a:r>
-              <a:rPr lang="en-US" altLang="zh-TW" smtClean="0"/>
+              <a:rPr lang="en-US" altLang="zh-TW"/>
               <a:t>Click to edit Master title style</a:t>
             </a:r>
             <a:endParaRPr lang="zh-TW" altLang="en-US"/>
@@ -1513,7 +1518,7 @@
           <a:p>
             <a:pPr lvl="0"/>
             <a:r>
-              <a:rPr lang="en-US" altLang="zh-TW" smtClean="0"/>
+              <a:rPr lang="en-US" altLang="zh-TW"/>
               <a:t>Edit Master text styles</a:t>
             </a:r>
           </a:p>
@@ -1569,35 +1574,35 @@
           <a:p>
             <a:pPr lvl="0"/>
             <a:r>
-              <a:rPr lang="en-US" altLang="zh-TW" smtClean="0"/>
+              <a:rPr lang="en-US" altLang="zh-TW"/>
               <a:t>Edit Master text styles</a:t>
             </a:r>
           </a:p>
           <a:p>
             <a:pPr lvl="1"/>
             <a:r>
-              <a:rPr lang="en-US" altLang="zh-TW" smtClean="0"/>
+              <a:rPr lang="en-US" altLang="zh-TW"/>
               <a:t>Second level</a:t>
             </a:r>
           </a:p>
           <a:p>
             <a:pPr lvl="2"/>
             <a:r>
-              <a:rPr lang="en-US" altLang="zh-TW" smtClean="0"/>
+              <a:rPr lang="en-US" altLang="zh-TW"/>
               <a:t>Third level</a:t>
             </a:r>
           </a:p>
           <a:p>
             <a:pPr lvl="3"/>
             <a:r>
-              <a:rPr lang="en-US" altLang="zh-TW" smtClean="0"/>
+              <a:rPr lang="en-US" altLang="zh-TW"/>
               <a:t>Fourth level</a:t>
             </a:r>
           </a:p>
           <a:p>
             <a:pPr lvl="4"/>
             <a:r>
-              <a:rPr lang="en-US" altLang="zh-TW" smtClean="0"/>
+              <a:rPr lang="en-US" altLang="zh-TW"/>
               <a:t>Fifth level</a:t>
             </a:r>
             <a:endParaRPr lang="zh-TW" altLang="en-US"/>
@@ -1663,7 +1668,7 @@
           <a:p>
             <a:pPr lvl="0"/>
             <a:r>
-              <a:rPr lang="en-US" altLang="zh-TW" smtClean="0"/>
+              <a:rPr lang="en-US" altLang="zh-TW"/>
               <a:t>Edit Master text styles</a:t>
             </a:r>
           </a:p>
@@ -1719,35 +1724,35 @@
           <a:p>
             <a:pPr lvl="0"/>
             <a:r>
-              <a:rPr lang="en-US" altLang="zh-TW" smtClean="0"/>
+              <a:rPr lang="en-US" altLang="zh-TW"/>
               <a:t>Edit Master text styles</a:t>
             </a:r>
           </a:p>
           <a:p>
             <a:pPr lvl="1"/>
             <a:r>
-              <a:rPr lang="en-US" altLang="zh-TW" smtClean="0"/>
+              <a:rPr lang="en-US" altLang="zh-TW"/>
               <a:t>Second level</a:t>
             </a:r>
           </a:p>
           <a:p>
             <a:pPr lvl="2"/>
             <a:r>
-              <a:rPr lang="en-US" altLang="zh-TW" smtClean="0"/>
+              <a:rPr lang="en-US" altLang="zh-TW"/>
               <a:t>Third level</a:t>
             </a:r>
           </a:p>
           <a:p>
             <a:pPr lvl="3"/>
             <a:r>
-              <a:rPr lang="en-US" altLang="zh-TW" smtClean="0"/>
+              <a:rPr lang="en-US" altLang="zh-TW"/>
               <a:t>Fourth level</a:t>
             </a:r>
           </a:p>
           <a:p>
             <a:pPr lvl="4"/>
             <a:r>
-              <a:rPr lang="en-US" altLang="zh-TW" smtClean="0"/>
+              <a:rPr lang="en-US" altLang="zh-TW"/>
               <a:t>Fifth level</a:t>
             </a:r>
             <a:endParaRPr lang="zh-TW" altLang="en-US"/>
@@ -1771,7 +1776,7 @@
           <a:p>
             <a:fld id="{DC17EE48-43D4-4F7F-A2E8-50E0E7942536}" type="datetimeFigureOut">
               <a:rPr lang="vi-VN" smtClean="0"/>
-              <a:t>01/10/2022</a:t>
+              <a:t>23/11/2024</a:t>
             </a:fld>
             <a:endParaRPr lang="vi-VN"/>
           </a:p>
@@ -1865,7 +1870,7 @@
           <a:lstStyle/>
           <a:p>
             <a:r>
-              <a:rPr lang="en-US" altLang="zh-TW" smtClean="0"/>
+              <a:rPr lang="en-US" altLang="zh-TW"/>
               <a:t>Click to edit Master title style</a:t>
             </a:r>
             <a:endParaRPr lang="zh-TW" altLang="en-US"/>
@@ -1889,7 +1894,7 @@
           <a:p>
             <a:fld id="{DC17EE48-43D4-4F7F-A2E8-50E0E7942536}" type="datetimeFigureOut">
               <a:rPr lang="vi-VN" smtClean="0"/>
-              <a:t>01/10/2022</a:t>
+              <a:t>23/11/2024</a:t>
             </a:fld>
             <a:endParaRPr lang="vi-VN"/>
           </a:p>
@@ -1984,7 +1989,7 @@
           <a:p>
             <a:fld id="{DC17EE48-43D4-4F7F-A2E8-50E0E7942536}" type="datetimeFigureOut">
               <a:rPr lang="vi-VN" smtClean="0"/>
-              <a:t>01/10/2022</a:t>
+              <a:t>23/11/2024</a:t>
             </a:fld>
             <a:endParaRPr lang="vi-VN"/>
           </a:p>
@@ -2087,7 +2092,7 @@
           </a:lstStyle>
           <a:p>
             <a:r>
-              <a:rPr lang="en-US" altLang="zh-TW" smtClean="0"/>
+              <a:rPr lang="en-US" altLang="zh-TW"/>
               <a:t>Click to edit Master title style</a:t>
             </a:r>
             <a:endParaRPr lang="zh-TW" altLang="en-US"/>
@@ -2144,35 +2149,35 @@
           <a:p>
             <a:pPr lvl="0"/>
             <a:r>
-              <a:rPr lang="en-US" altLang="zh-TW" smtClean="0"/>
+              <a:rPr lang="en-US" altLang="zh-TW"/>
               <a:t>Edit Master text styles</a:t>
             </a:r>
           </a:p>
           <a:p>
             <a:pPr lvl="1"/>
             <a:r>
-              <a:rPr lang="en-US" altLang="zh-TW" smtClean="0"/>
+              <a:rPr lang="en-US" altLang="zh-TW"/>
               <a:t>Second level</a:t>
             </a:r>
           </a:p>
           <a:p>
             <a:pPr lvl="2"/>
             <a:r>
-              <a:rPr lang="en-US" altLang="zh-TW" smtClean="0"/>
+              <a:rPr lang="en-US" altLang="zh-TW"/>
               <a:t>Third level</a:t>
             </a:r>
           </a:p>
           <a:p>
             <a:pPr lvl="3"/>
             <a:r>
-              <a:rPr lang="en-US" altLang="zh-TW" smtClean="0"/>
+              <a:rPr lang="en-US" altLang="zh-TW"/>
               <a:t>Fourth level</a:t>
             </a:r>
           </a:p>
           <a:p>
             <a:pPr lvl="4"/>
             <a:r>
-              <a:rPr lang="en-US" altLang="zh-TW" smtClean="0"/>
+              <a:rPr lang="en-US" altLang="zh-TW"/>
               <a:t>Fifth level</a:t>
             </a:r>
             <a:endParaRPr lang="zh-TW" altLang="en-US"/>
@@ -2238,7 +2243,7 @@
           <a:p>
             <a:pPr lvl="0"/>
             <a:r>
-              <a:rPr lang="en-US" altLang="zh-TW" smtClean="0"/>
+              <a:rPr lang="en-US" altLang="zh-TW"/>
               <a:t>Edit Master text styles</a:t>
             </a:r>
           </a:p>
@@ -2261,7 +2266,7 @@
           <a:p>
             <a:fld id="{DC17EE48-43D4-4F7F-A2E8-50E0E7942536}" type="datetimeFigureOut">
               <a:rPr lang="vi-VN" smtClean="0"/>
-              <a:t>01/10/2022</a:t>
+              <a:t>23/11/2024</a:t>
             </a:fld>
             <a:endParaRPr lang="vi-VN"/>
           </a:p>
@@ -2364,7 +2369,7 @@
           </a:lstStyle>
           <a:p>
             <a:r>
-              <a:rPr lang="en-US" altLang="zh-TW" smtClean="0"/>
+              <a:rPr lang="en-US" altLang="zh-TW"/>
               <a:t>Click to edit Master title style</a:t>
             </a:r>
             <a:endParaRPr lang="zh-TW" altLang="en-US"/>
@@ -2429,7 +2434,7 @@
           </a:lstStyle>
           <a:p>
             <a:r>
-              <a:rPr lang="en-US" altLang="zh-TW" smtClean="0"/>
+              <a:rPr lang="en-US" altLang="zh-TW"/>
               <a:t>Click icon to add picture</a:t>
             </a:r>
             <a:endParaRPr lang="zh-TW" altLang="en-US"/>
@@ -2495,7 +2500,7 @@
           <a:p>
             <a:pPr lvl="0"/>
             <a:r>
-              <a:rPr lang="en-US" altLang="zh-TW" smtClean="0"/>
+              <a:rPr lang="en-US" altLang="zh-TW"/>
               <a:t>Edit Master text styles</a:t>
             </a:r>
           </a:p>
@@ -2518,7 +2523,7 @@
           <a:p>
             <a:fld id="{DC17EE48-43D4-4F7F-A2E8-50E0E7942536}" type="datetimeFigureOut">
               <a:rPr lang="vi-VN" smtClean="0"/>
-              <a:t>01/10/2022</a:t>
+              <a:t>23/11/2024</a:t>
             </a:fld>
             <a:endParaRPr lang="vi-VN"/>
           </a:p>
@@ -2632,10 +2637,9 @@
           <a:lstStyle/>
           <a:p>
             <a:r>
-              <a:rPr lang="zh-TW" altLang="en-US" smtClean="0"/>
+              <a:rPr lang="zh-TW" altLang="en-US"/>
               <a:t>按一下以編輯母片標題樣式</a:t>
             </a:r>
-            <a:endParaRPr lang="zh-TW" altLang="en-US"/>
           </a:p>
         </p:txBody>
       </p:sp>
@@ -2666,38 +2670,37 @@
           <a:p>
             <a:pPr lvl="0"/>
             <a:r>
-              <a:rPr lang="zh-TW" altLang="en-US" smtClean="0"/>
+              <a:rPr lang="zh-TW" altLang="en-US"/>
               <a:t>按一下以編輯母片文字樣式</a:t>
             </a:r>
           </a:p>
           <a:p>
             <a:pPr lvl="1"/>
             <a:r>
-              <a:rPr lang="zh-TW" altLang="en-US" smtClean="0"/>
+              <a:rPr lang="zh-TW" altLang="en-US"/>
               <a:t>第二層</a:t>
             </a:r>
           </a:p>
           <a:p>
             <a:pPr lvl="2"/>
             <a:r>
-              <a:rPr lang="zh-TW" altLang="en-US" smtClean="0"/>
+              <a:rPr lang="zh-TW" altLang="en-US"/>
               <a:t>第三層</a:t>
             </a:r>
           </a:p>
           <a:p>
             <a:pPr lvl="3"/>
             <a:r>
-              <a:rPr lang="zh-TW" altLang="en-US" smtClean="0"/>
+              <a:rPr lang="zh-TW" altLang="en-US"/>
               <a:t>第四層</a:t>
             </a:r>
           </a:p>
           <a:p>
             <a:pPr lvl="4"/>
             <a:r>
-              <a:rPr lang="zh-TW" altLang="en-US" smtClean="0"/>
+              <a:rPr lang="zh-TW" altLang="en-US"/>
               <a:t>第五層</a:t>
             </a:r>
-            <a:endParaRPr lang="zh-TW" altLang="en-US"/>
           </a:p>
         </p:txBody>
       </p:sp>
@@ -2736,7 +2739,7 @@
           <a:p>
             <a:fld id="{DC17EE48-43D4-4F7F-A2E8-50E0E7942536}" type="datetimeFigureOut">
               <a:rPr lang="vi-VN" smtClean="0"/>
-              <a:t>01/10/2022</a:t>
+              <a:t>23/11/2024</a:t>
             </a:fld>
             <a:endParaRPr lang="vi-VN"/>
           </a:p>
@@ -3148,24 +3151,7 @@
                 <a:latin typeface="微軟正黑體" pitchFamily="34" charset="-120"/>
                 <a:ea typeface="微軟正黑體" pitchFamily="34" charset="-120"/>
               </a:rPr>
-              <a:t>在</a:t>
-            </a:r>
-            <a:r>
-              <a:rPr lang="zh-CN" altLang="en-US" sz="7200" b="1" i="1" dirty="0">
-                <a:solidFill>
-                  <a:srgbClr val="660033"/>
-                </a:solidFill>
-                <a:effectLst>
-                  <a:outerShdw blurRad="38100" dist="38100" dir="2700000" algn="tl">
-                    <a:srgbClr val="000000">
-                      <a:alpha val="43137"/>
-                    </a:srgbClr>
-                  </a:outerShdw>
-                </a:effectLst>
-                <a:latin typeface="微軟正黑體" pitchFamily="34" charset="-120"/>
-                <a:ea typeface="微軟正黑體" pitchFamily="34" charset="-120"/>
-              </a:rPr>
-              <a:t>祢殿中</a:t>
+              <a:t>在祢殿中</a:t>
             </a:r>
           </a:p>
         </p:txBody>
@@ -3233,47 +3219,7 @@
                 <a:latin typeface="微軟正黑體" pitchFamily="34" charset="-120"/>
                 <a:ea typeface="微軟正黑體" pitchFamily="34" charset="-120"/>
               </a:rPr>
-              <a:t>我</a:t>
-            </a:r>
-            <a:r>
-              <a:rPr lang="zh-TW" altLang="en-US" sz="6400" b="1" dirty="0">
-                <a:solidFill>
-                  <a:srgbClr val="660033"/>
-                </a:solidFill>
-                <a:latin typeface="微軟正黑體" pitchFamily="34" charset="-120"/>
-                <a:ea typeface="微軟正黑體" pitchFamily="34" charset="-120"/>
-              </a:rPr>
-              <a:t>願在祢殿中 </a:t>
-            </a:r>
-            <a:r>
-              <a:rPr lang="zh-TW" altLang="en-US" sz="6400" b="1" dirty="0">
-                <a:solidFill>
-                  <a:srgbClr val="660033"/>
-                </a:solidFill>
-                <a:latin typeface="微軟正黑體" pitchFamily="34" charset="-120"/>
-                <a:ea typeface="微軟正黑體" pitchFamily="34" charset="-120"/>
-              </a:rPr>
-              <a:t> 俯</a:t>
-            </a:r>
-            <a:r>
-              <a:rPr lang="zh-TW" altLang="en-US" sz="6400" b="1" dirty="0">
-                <a:solidFill>
-                  <a:srgbClr val="660033"/>
-                </a:solidFill>
-                <a:latin typeface="微軟正黑體" pitchFamily="34" charset="-120"/>
-                <a:ea typeface="微軟正黑體" pitchFamily="34" charset="-120"/>
-              </a:rPr>
-              <a:t>伏敬拜稱</a:t>
-            </a:r>
-            <a:r>
-              <a:rPr lang="zh-TW" altLang="en-US" sz="6400" b="1" dirty="0">
-                <a:solidFill>
-                  <a:srgbClr val="660033"/>
-                </a:solidFill>
-                <a:latin typeface="微軟正黑體" pitchFamily="34" charset="-120"/>
-                <a:ea typeface="微軟正黑體" pitchFamily="34" charset="-120"/>
-              </a:rPr>
-              <a:t>謝</a:t>
+              <a:t>我願在祢殿中  俯伏敬拜稱謝</a:t>
             </a:r>
             <a:endParaRPr lang="en-US" altLang="zh-TW" sz="6400" b="1" dirty="0">
               <a:solidFill>
@@ -3295,17 +3241,7 @@
                 <a:latin typeface="微軟正黑體" pitchFamily="34" charset="-120"/>
                 <a:ea typeface="微軟正黑體" pitchFamily="34" charset="-120"/>
               </a:rPr>
-              <a:t>數</a:t>
-            </a:r>
-            <a:r>
-              <a:rPr lang="zh-TW" altLang="en-US" sz="6400" b="1" dirty="0">
-                <a:solidFill>
-                  <a:srgbClr val="660033"/>
-                </a:solidFill>
-                <a:latin typeface="微軟正黑體" pitchFamily="34" charset="-120"/>
-                <a:ea typeface="微軟正黑體" pitchFamily="34" charset="-120"/>
-              </a:rPr>
-              <a:t>算祢恩典</a:t>
+              <a:t>數算祢恩典</a:t>
             </a:r>
             <a:endParaRPr lang="en-US" altLang="zh-TW" sz="6400" b="1" dirty="0">
               <a:solidFill>
@@ -3358,7 +3294,7 @@
                 <a:latin typeface="Microsoft JhengHei" panose="020B0604030504040204" pitchFamily="34" charset="-120"/>
                 <a:ea typeface="Microsoft JhengHei" panose="020B0604030504040204" pitchFamily="34" charset="-120"/>
               </a:rPr>
-              <a:t>正</a:t>
+              <a:t>正歌</a:t>
             </a:r>
             <a:r>
               <a:rPr lang="en-US" sz="4267" b="1" dirty="0">
@@ -3442,37 +3378,7 @@
                 <a:latin typeface="微軟正黑體" pitchFamily="34" charset="-120"/>
                 <a:ea typeface="微軟正黑體" pitchFamily="34" charset="-120"/>
               </a:rPr>
-              <a:t>思念祢的慈愛 </a:t>
-            </a:r>
-            <a:r>
-              <a:rPr lang="zh-TW" altLang="en-US" sz="6400" b="1" dirty="0">
-                <a:solidFill>
-                  <a:srgbClr val="660033"/>
-                </a:solidFill>
-                <a:latin typeface="微軟正黑體" pitchFamily="34" charset="-120"/>
-                <a:ea typeface="微軟正黑體" pitchFamily="34" charset="-120"/>
-              </a:rPr>
-              <a:t> 述</a:t>
-            </a:r>
-            <a:r>
-              <a:rPr lang="zh-TW" altLang="en-US" sz="6400" b="1" dirty="0">
-                <a:solidFill>
-                  <a:srgbClr val="660033"/>
-                </a:solidFill>
-                <a:latin typeface="微軟正黑體" pitchFamily="34" charset="-120"/>
-                <a:ea typeface="微軟正黑體" pitchFamily="34" charset="-120"/>
-              </a:rPr>
-              <a:t>説祢的榮</a:t>
-            </a:r>
-            <a:r>
-              <a:rPr lang="zh-TW" altLang="en-US" sz="6400" b="1" dirty="0">
-                <a:solidFill>
-                  <a:srgbClr val="660033"/>
-                </a:solidFill>
-                <a:latin typeface="微軟正黑體" pitchFamily="34" charset="-120"/>
-                <a:ea typeface="微軟正黑體" pitchFamily="34" charset="-120"/>
-              </a:rPr>
-              <a:t>耀</a:t>
+              <a:t>思念祢的慈愛  述説祢的榮耀</a:t>
             </a:r>
             <a:endParaRPr lang="en-US" altLang="zh-TW" sz="6400" b="1" dirty="0">
               <a:solidFill>
@@ -3494,17 +3400,7 @@
                 <a:latin typeface="微軟正黑體" pitchFamily="34" charset="-120"/>
                 <a:ea typeface="微軟正黑體" pitchFamily="34" charset="-120"/>
               </a:rPr>
-              <a:t>敬</a:t>
-            </a:r>
-            <a:r>
-              <a:rPr lang="zh-TW" altLang="en-US" sz="6400" b="1" dirty="0">
-                <a:solidFill>
-                  <a:srgbClr val="660033"/>
-                </a:solidFill>
-                <a:latin typeface="微軟正黑體" pitchFamily="34" charset="-120"/>
-                <a:ea typeface="微軟正黑體" pitchFamily="34" charset="-120"/>
-              </a:rPr>
-              <a:t>拜到永遠</a:t>
+              <a:t>敬拜到永遠</a:t>
             </a:r>
             <a:endParaRPr lang="en-US" altLang="zh-TW" sz="6400" b="1" dirty="0">
               <a:solidFill>
@@ -3557,7 +3453,7 @@
                 <a:latin typeface="Microsoft JhengHei" panose="020B0604030504040204" pitchFamily="34" charset="-120"/>
                 <a:ea typeface="Microsoft JhengHei" panose="020B0604030504040204" pitchFamily="34" charset="-120"/>
               </a:rPr>
-              <a:t>正</a:t>
+              <a:t>正歌 </a:t>
             </a:r>
             <a:r>
               <a:rPr lang="en-US" sz="4267" b="1" dirty="0">
@@ -3567,7 +3463,7 @@
                 <a:latin typeface="Microsoft JhengHei" panose="020B0604030504040204" pitchFamily="34" charset="-120"/>
                 <a:ea typeface="Microsoft JhengHei" panose="020B0604030504040204" pitchFamily="34" charset="-120"/>
               </a:rPr>
-              <a:t> 1 )</a:t>
+              <a:t>1 )</a:t>
             </a:r>
             <a:endParaRPr lang="vi-VN" sz="4267" b="1" dirty="0">
               <a:solidFill>
@@ -3641,57 +3537,7 @@
                 <a:latin typeface="微軟正黑體" pitchFamily="34" charset="-120"/>
                 <a:ea typeface="微軟正黑體" pitchFamily="34" charset="-120"/>
               </a:rPr>
-              <a:t>耶穌 </a:t>
-            </a:r>
-            <a:r>
-              <a:rPr lang="zh-TW" altLang="en-US" sz="6400" b="1" dirty="0">
-                <a:solidFill>
-                  <a:srgbClr val="660033"/>
-                </a:solidFill>
-                <a:latin typeface="微軟正黑體" pitchFamily="34" charset="-120"/>
-                <a:ea typeface="微軟正黑體" pitchFamily="34" charset="-120"/>
-              </a:rPr>
-              <a:t> 耶</a:t>
-            </a:r>
-            <a:r>
-              <a:rPr lang="zh-TW" altLang="en-US" sz="6400" b="1" dirty="0">
-                <a:solidFill>
-                  <a:srgbClr val="660033"/>
-                </a:solidFill>
-                <a:latin typeface="微軟正黑體" pitchFamily="34" charset="-120"/>
-                <a:ea typeface="微軟正黑體" pitchFamily="34" charset="-120"/>
-              </a:rPr>
-              <a:t>穌 </a:t>
-            </a:r>
-            <a:r>
-              <a:rPr lang="zh-TW" altLang="en-US" sz="6400" b="1" dirty="0">
-                <a:solidFill>
-                  <a:srgbClr val="660033"/>
-                </a:solidFill>
-                <a:latin typeface="微軟正黑體" pitchFamily="34" charset="-120"/>
-                <a:ea typeface="微軟正黑體" pitchFamily="34" charset="-120"/>
-              </a:rPr>
-              <a:t> 聖</a:t>
-            </a:r>
-            <a:r>
-              <a:rPr lang="zh-TW" altLang="en-US" sz="6400" b="1" dirty="0">
-                <a:solidFill>
-                  <a:srgbClr val="660033"/>
-                </a:solidFill>
-                <a:latin typeface="微軟正黑體" pitchFamily="34" charset="-120"/>
-                <a:ea typeface="微軟正黑體" pitchFamily="34" charset="-120"/>
-              </a:rPr>
-              <a:t>潔的羔</a:t>
-            </a:r>
-            <a:r>
-              <a:rPr lang="zh-TW" altLang="en-US" sz="6400" b="1" dirty="0">
-                <a:solidFill>
-                  <a:srgbClr val="660033"/>
-                </a:solidFill>
-                <a:latin typeface="微軟正黑體" pitchFamily="34" charset="-120"/>
-                <a:ea typeface="微軟正黑體" pitchFamily="34" charset="-120"/>
-              </a:rPr>
-              <a:t>羊</a:t>
+              <a:t>耶穌  耶穌  聖潔的羔羊</a:t>
             </a:r>
             <a:endParaRPr lang="en-US" altLang="zh-TW" sz="6400" b="1" dirty="0">
               <a:solidFill>
@@ -3713,57 +3559,7 @@
                 <a:latin typeface="微軟正黑體" pitchFamily="34" charset="-120"/>
                 <a:ea typeface="微軟正黑體" pitchFamily="34" charset="-120"/>
               </a:rPr>
-              <a:t>耶</a:t>
-            </a:r>
-            <a:r>
-              <a:rPr lang="zh-TW" altLang="en-US" sz="6400" b="1" dirty="0">
-                <a:solidFill>
-                  <a:srgbClr val="660033"/>
-                </a:solidFill>
-                <a:latin typeface="微軟正黑體" pitchFamily="34" charset="-120"/>
-                <a:ea typeface="微軟正黑體" pitchFamily="34" charset="-120"/>
-              </a:rPr>
-              <a:t>穌 </a:t>
-            </a:r>
-            <a:r>
-              <a:rPr lang="zh-TW" altLang="en-US" sz="6400" b="1" dirty="0">
-                <a:solidFill>
-                  <a:srgbClr val="660033"/>
-                </a:solidFill>
-                <a:latin typeface="微軟正黑體" pitchFamily="34" charset="-120"/>
-                <a:ea typeface="微軟正黑體" pitchFamily="34" charset="-120"/>
-              </a:rPr>
-              <a:t> 耶</a:t>
-            </a:r>
-            <a:r>
-              <a:rPr lang="zh-TW" altLang="en-US" sz="6400" b="1" dirty="0">
-                <a:solidFill>
-                  <a:srgbClr val="660033"/>
-                </a:solidFill>
-                <a:latin typeface="微軟正黑體" pitchFamily="34" charset="-120"/>
-                <a:ea typeface="微軟正黑體" pitchFamily="34" charset="-120"/>
-              </a:rPr>
-              <a:t>穌 </a:t>
-            </a:r>
-            <a:r>
-              <a:rPr lang="zh-TW" altLang="en-US" sz="6400" b="1" dirty="0">
-                <a:solidFill>
-                  <a:srgbClr val="660033"/>
-                </a:solidFill>
-                <a:latin typeface="微軟正黑體" pitchFamily="34" charset="-120"/>
-                <a:ea typeface="微軟正黑體" pitchFamily="34" charset="-120"/>
-              </a:rPr>
-              <a:t> 一</a:t>
-            </a:r>
-            <a:r>
-              <a:rPr lang="zh-TW" altLang="en-US" sz="6400" b="1" dirty="0">
-                <a:solidFill>
-                  <a:srgbClr val="660033"/>
-                </a:solidFill>
-                <a:latin typeface="微軟正黑體" pitchFamily="34" charset="-120"/>
-                <a:ea typeface="微軟正黑體" pitchFamily="34" charset="-120"/>
-              </a:rPr>
-              <a:t>生敬拜祢</a:t>
+              <a:t>耶穌  耶穌  一生敬拜祢</a:t>
             </a:r>
             <a:endParaRPr lang="en-US" altLang="zh-TW" sz="6400" b="1" dirty="0">
               <a:solidFill>
@@ -3816,7 +3612,7 @@
                 <a:latin typeface="Microsoft JhengHei" panose="020B0604030504040204" pitchFamily="34" charset="-120"/>
                 <a:ea typeface="Microsoft JhengHei" panose="020B0604030504040204" pitchFamily="34" charset="-120"/>
               </a:rPr>
-              <a:t>副</a:t>
+              <a:t>副歌 </a:t>
             </a:r>
             <a:r>
               <a:rPr lang="en-US" sz="4267" b="1" dirty="0">
@@ -3826,7 +3622,7 @@
                 <a:latin typeface="Microsoft JhengHei" panose="020B0604030504040204" pitchFamily="34" charset="-120"/>
                 <a:ea typeface="Microsoft JhengHei" panose="020B0604030504040204" pitchFamily="34" charset="-120"/>
               </a:rPr>
-              <a:t> )</a:t>
+              <a:t>)</a:t>
             </a:r>
             <a:endParaRPr lang="vi-VN" sz="4267" b="1" dirty="0">
               <a:solidFill>
@@ -3900,37 +3696,7 @@
                 <a:latin typeface="微軟正黑體" pitchFamily="34" charset="-120"/>
                 <a:ea typeface="微軟正黑體" pitchFamily="34" charset="-120"/>
               </a:rPr>
-              <a:t>在祢殿中一日 </a:t>
-            </a:r>
-            <a:r>
-              <a:rPr lang="zh-TW" altLang="en-US" sz="6400" b="1" dirty="0">
-                <a:solidFill>
-                  <a:srgbClr val="660033"/>
-                </a:solidFill>
-                <a:latin typeface="微軟正黑體" pitchFamily="34" charset="-120"/>
-                <a:ea typeface="微軟正黑體" pitchFamily="34" charset="-120"/>
-              </a:rPr>
-              <a:t> 勝</a:t>
-            </a:r>
-            <a:r>
-              <a:rPr lang="zh-TW" altLang="en-US" sz="6400" b="1" dirty="0">
-                <a:solidFill>
-                  <a:srgbClr val="660033"/>
-                </a:solidFill>
-                <a:latin typeface="微軟正黑體" pitchFamily="34" charset="-120"/>
-                <a:ea typeface="微軟正黑體" pitchFamily="34" charset="-120"/>
-              </a:rPr>
-              <a:t>別處住千</a:t>
-            </a:r>
-            <a:r>
-              <a:rPr lang="zh-TW" altLang="en-US" sz="6400" b="1" dirty="0">
-                <a:solidFill>
-                  <a:srgbClr val="660033"/>
-                </a:solidFill>
-                <a:latin typeface="微軟正黑體" pitchFamily="34" charset="-120"/>
-                <a:ea typeface="微軟正黑體" pitchFamily="34" charset="-120"/>
-              </a:rPr>
-              <a:t>日</a:t>
+              <a:t>在祢殿中一日  勝別處住千日</a:t>
             </a:r>
             <a:endParaRPr lang="en-US" altLang="zh-TW" sz="6400" b="1" dirty="0">
               <a:solidFill>
@@ -3952,17 +3718,7 @@
                 <a:latin typeface="微軟正黑體" pitchFamily="34" charset="-120"/>
                 <a:ea typeface="微軟正黑體" pitchFamily="34" charset="-120"/>
               </a:rPr>
-              <a:t>心</a:t>
-            </a:r>
-            <a:r>
-              <a:rPr lang="zh-TW" altLang="en-US" sz="6400" b="1" dirty="0">
-                <a:solidFill>
-                  <a:srgbClr val="660033"/>
-                </a:solidFill>
-                <a:latin typeface="微軟正黑體" pitchFamily="34" charset="-120"/>
-                <a:ea typeface="微軟正黑體" pitchFamily="34" charset="-120"/>
-              </a:rPr>
-              <a:t>何等甘甜</a:t>
+              <a:t>心何等甘甜</a:t>
             </a:r>
             <a:endParaRPr lang="en-US" altLang="zh-TW" sz="6400" b="1" dirty="0">
               <a:solidFill>
@@ -4015,7 +3771,7 @@
                 <a:latin typeface="Microsoft JhengHei" panose="020B0604030504040204" pitchFamily="34" charset="-120"/>
                 <a:ea typeface="Microsoft JhengHei" panose="020B0604030504040204" pitchFamily="34" charset="-120"/>
               </a:rPr>
-              <a:t>正</a:t>
+              <a:t>正歌 </a:t>
             </a:r>
             <a:r>
               <a:rPr lang="en-US" sz="4267" b="1" dirty="0">
@@ -4025,7 +3781,7 @@
                 <a:latin typeface="Microsoft JhengHei" panose="020B0604030504040204" pitchFamily="34" charset="-120"/>
                 <a:ea typeface="Microsoft JhengHei" panose="020B0604030504040204" pitchFamily="34" charset="-120"/>
               </a:rPr>
-              <a:t> 2 )</a:t>
+              <a:t>2 )</a:t>
             </a:r>
             <a:endParaRPr lang="vi-VN" sz="4267" b="1" dirty="0">
               <a:solidFill>
@@ -4099,37 +3855,7 @@
                 <a:latin typeface="微軟正黑體" pitchFamily="34" charset="-120"/>
                 <a:ea typeface="微軟正黑體" pitchFamily="34" charset="-120"/>
               </a:rPr>
-              <a:t>瞻仰祢的榮面 </a:t>
-            </a:r>
-            <a:r>
-              <a:rPr lang="zh-TW" altLang="en-US" sz="6400" b="1" dirty="0">
-                <a:solidFill>
-                  <a:srgbClr val="660033"/>
-                </a:solidFill>
-                <a:latin typeface="微軟正黑體" pitchFamily="34" charset="-120"/>
-                <a:ea typeface="微軟正黑體" pitchFamily="34" charset="-120"/>
-              </a:rPr>
-              <a:t> 聆</a:t>
-            </a:r>
-            <a:r>
-              <a:rPr lang="zh-TW" altLang="en-US" sz="6400" b="1" dirty="0">
-                <a:solidFill>
-                  <a:srgbClr val="660033"/>
-                </a:solidFill>
-                <a:latin typeface="微軟正黑體" pitchFamily="34" charset="-120"/>
-                <a:ea typeface="微軟正黑體" pitchFamily="34" charset="-120"/>
-              </a:rPr>
-              <a:t>聽祢的聲</a:t>
-            </a:r>
-            <a:r>
-              <a:rPr lang="zh-TW" altLang="en-US" sz="6400" b="1" dirty="0">
-                <a:solidFill>
-                  <a:srgbClr val="660033"/>
-                </a:solidFill>
-                <a:latin typeface="微軟正黑體" pitchFamily="34" charset="-120"/>
-                <a:ea typeface="微軟正黑體" pitchFamily="34" charset="-120"/>
-              </a:rPr>
-              <a:t>音</a:t>
+              <a:t>瞻仰祢的榮面  聆聽祢的聲音</a:t>
             </a:r>
             <a:endParaRPr lang="en-US" altLang="zh-TW" sz="6400" b="1" dirty="0">
               <a:solidFill>
@@ -4151,17 +3877,7 @@
                 <a:latin typeface="微軟正黑體" pitchFamily="34" charset="-120"/>
                 <a:ea typeface="微軟正黑體" pitchFamily="34" charset="-120"/>
               </a:rPr>
-              <a:t>浸</a:t>
-            </a:r>
-            <a:r>
-              <a:rPr lang="zh-TW" altLang="en-US" sz="6400" b="1" dirty="0">
-                <a:solidFill>
-                  <a:srgbClr val="660033"/>
-                </a:solidFill>
-                <a:latin typeface="微軟正黑體" pitchFamily="34" charset="-120"/>
-                <a:ea typeface="微軟正黑體" pitchFamily="34" charset="-120"/>
-              </a:rPr>
-              <a:t>入永恆間</a:t>
+              <a:t>浸入永恆間</a:t>
             </a:r>
             <a:endParaRPr lang="en-US" altLang="zh-TW" sz="6400" b="1" dirty="0">
               <a:solidFill>
@@ -4214,7 +3930,7 @@
                 <a:latin typeface="Microsoft JhengHei" panose="020B0604030504040204" pitchFamily="34" charset="-120"/>
                 <a:ea typeface="Microsoft JhengHei" panose="020B0604030504040204" pitchFamily="34" charset="-120"/>
               </a:rPr>
-              <a:t>正</a:t>
+              <a:t>正歌 </a:t>
             </a:r>
             <a:r>
               <a:rPr lang="en-US" sz="4267" b="1" dirty="0">
@@ -4224,7 +3940,7 @@
                 <a:latin typeface="Microsoft JhengHei" panose="020B0604030504040204" pitchFamily="34" charset="-120"/>
                 <a:ea typeface="Microsoft JhengHei" panose="020B0604030504040204" pitchFamily="34" charset="-120"/>
               </a:rPr>
-              <a:t> 2 )</a:t>
+              <a:t>2 )</a:t>
             </a:r>
             <a:endParaRPr lang="vi-VN" sz="4267" b="1" dirty="0">
               <a:solidFill>
@@ -4298,57 +4014,7 @@
                 <a:latin typeface="微軟正黑體" pitchFamily="34" charset="-120"/>
                 <a:ea typeface="微軟正黑體" pitchFamily="34" charset="-120"/>
               </a:rPr>
-              <a:t>耶穌 </a:t>
-            </a:r>
-            <a:r>
-              <a:rPr lang="zh-TW" altLang="en-US" sz="6400" b="1" dirty="0">
-                <a:solidFill>
-                  <a:srgbClr val="660033"/>
-                </a:solidFill>
-                <a:latin typeface="微軟正黑體" pitchFamily="34" charset="-120"/>
-                <a:ea typeface="微軟正黑體" pitchFamily="34" charset="-120"/>
-              </a:rPr>
-              <a:t> 耶</a:t>
-            </a:r>
-            <a:r>
-              <a:rPr lang="zh-TW" altLang="en-US" sz="6400" b="1" dirty="0">
-                <a:solidFill>
-                  <a:srgbClr val="660033"/>
-                </a:solidFill>
-                <a:latin typeface="微軟正黑體" pitchFamily="34" charset="-120"/>
-                <a:ea typeface="微軟正黑體" pitchFamily="34" charset="-120"/>
-              </a:rPr>
-              <a:t>穌 </a:t>
-            </a:r>
-            <a:r>
-              <a:rPr lang="zh-TW" altLang="en-US" sz="6400" b="1" dirty="0">
-                <a:solidFill>
-                  <a:srgbClr val="660033"/>
-                </a:solidFill>
-                <a:latin typeface="微軟正黑體" pitchFamily="34" charset="-120"/>
-                <a:ea typeface="微軟正黑體" pitchFamily="34" charset="-120"/>
-              </a:rPr>
-              <a:t> 聖</a:t>
-            </a:r>
-            <a:r>
-              <a:rPr lang="zh-TW" altLang="en-US" sz="6400" b="1" dirty="0">
-                <a:solidFill>
-                  <a:srgbClr val="660033"/>
-                </a:solidFill>
-                <a:latin typeface="微軟正黑體" pitchFamily="34" charset="-120"/>
-                <a:ea typeface="微軟正黑體" pitchFamily="34" charset="-120"/>
-              </a:rPr>
-              <a:t>潔的羔</a:t>
-            </a:r>
-            <a:r>
-              <a:rPr lang="zh-TW" altLang="en-US" sz="6400" b="1" dirty="0">
-                <a:solidFill>
-                  <a:srgbClr val="660033"/>
-                </a:solidFill>
-                <a:latin typeface="微軟正黑體" pitchFamily="34" charset="-120"/>
-                <a:ea typeface="微軟正黑體" pitchFamily="34" charset="-120"/>
-              </a:rPr>
-              <a:t>羊</a:t>
+              <a:t>耶穌  耶穌  聖潔的羔羊</a:t>
             </a:r>
             <a:endParaRPr lang="en-US" altLang="zh-TW" sz="6400" b="1" dirty="0">
               <a:solidFill>
@@ -4370,57 +4036,7 @@
                 <a:latin typeface="微軟正黑體" pitchFamily="34" charset="-120"/>
                 <a:ea typeface="微軟正黑體" pitchFamily="34" charset="-120"/>
               </a:rPr>
-              <a:t>耶</a:t>
-            </a:r>
-            <a:r>
-              <a:rPr lang="zh-TW" altLang="en-US" sz="6400" b="1" dirty="0">
-                <a:solidFill>
-                  <a:srgbClr val="660033"/>
-                </a:solidFill>
-                <a:latin typeface="微軟正黑體" pitchFamily="34" charset="-120"/>
-                <a:ea typeface="微軟正黑體" pitchFamily="34" charset="-120"/>
-              </a:rPr>
-              <a:t>穌 </a:t>
-            </a:r>
-            <a:r>
-              <a:rPr lang="zh-TW" altLang="en-US" sz="6400" b="1" dirty="0">
-                <a:solidFill>
-                  <a:srgbClr val="660033"/>
-                </a:solidFill>
-                <a:latin typeface="微軟正黑體" pitchFamily="34" charset="-120"/>
-                <a:ea typeface="微軟正黑體" pitchFamily="34" charset="-120"/>
-              </a:rPr>
-              <a:t> 耶</a:t>
-            </a:r>
-            <a:r>
-              <a:rPr lang="zh-TW" altLang="en-US" sz="6400" b="1" dirty="0">
-                <a:solidFill>
-                  <a:srgbClr val="660033"/>
-                </a:solidFill>
-                <a:latin typeface="微軟正黑體" pitchFamily="34" charset="-120"/>
-                <a:ea typeface="微軟正黑體" pitchFamily="34" charset="-120"/>
-              </a:rPr>
-              <a:t>穌 </a:t>
-            </a:r>
-            <a:r>
-              <a:rPr lang="zh-TW" altLang="en-US" sz="6400" b="1" dirty="0">
-                <a:solidFill>
-                  <a:srgbClr val="660033"/>
-                </a:solidFill>
-                <a:latin typeface="微軟正黑體" pitchFamily="34" charset="-120"/>
-                <a:ea typeface="微軟正黑體" pitchFamily="34" charset="-120"/>
-              </a:rPr>
-              <a:t> 一</a:t>
-            </a:r>
-            <a:r>
-              <a:rPr lang="zh-TW" altLang="en-US" sz="6400" b="1" dirty="0">
-                <a:solidFill>
-                  <a:srgbClr val="660033"/>
-                </a:solidFill>
-                <a:latin typeface="微軟正黑體" pitchFamily="34" charset="-120"/>
-                <a:ea typeface="微軟正黑體" pitchFamily="34" charset="-120"/>
-              </a:rPr>
-              <a:t>生敬拜祢</a:t>
+              <a:t>耶穌  耶穌  一生敬拜祢</a:t>
             </a:r>
             <a:endParaRPr lang="en-US" altLang="zh-TW" sz="6400" b="1" dirty="0">
               <a:solidFill>
@@ -4473,7 +4089,7 @@
                 <a:latin typeface="Microsoft JhengHei" panose="020B0604030504040204" pitchFamily="34" charset="-120"/>
                 <a:ea typeface="Microsoft JhengHei" panose="020B0604030504040204" pitchFamily="34" charset="-120"/>
               </a:rPr>
-              <a:t>副</a:t>
+              <a:t>副歌 </a:t>
             </a:r>
             <a:r>
               <a:rPr lang="en-US" sz="4267" b="1" dirty="0">
@@ -4483,7 +4099,7 @@
                 <a:latin typeface="Microsoft JhengHei" panose="020B0604030504040204" pitchFamily="34" charset="-120"/>
                 <a:ea typeface="Microsoft JhengHei" panose="020B0604030504040204" pitchFamily="34" charset="-120"/>
               </a:rPr>
-              <a:t> )</a:t>
+              <a:t>)</a:t>
             </a:r>
             <a:endParaRPr lang="vi-VN" sz="4267" b="1" dirty="0">
               <a:solidFill>
@@ -4557,27 +4173,7 @@
                 <a:latin typeface="微軟正黑體" pitchFamily="34" charset="-120"/>
                 <a:ea typeface="微軟正黑體" pitchFamily="34" charset="-120"/>
               </a:rPr>
-              <a:t>一生敬拜祢 </a:t>
-            </a:r>
-            <a:r>
-              <a:rPr lang="zh-CN" altLang="en-US" sz="6400" b="1" dirty="0">
-                <a:solidFill>
-                  <a:srgbClr val="660033"/>
-                </a:solidFill>
-                <a:latin typeface="微軟正黑體" pitchFamily="34" charset="-120"/>
-                <a:ea typeface="微軟正黑體" pitchFamily="34" charset="-120"/>
-              </a:rPr>
-              <a:t> 一</a:t>
-            </a:r>
-            <a:r>
-              <a:rPr lang="zh-CN" altLang="en-US" sz="6400" b="1" dirty="0">
-                <a:solidFill>
-                  <a:srgbClr val="660033"/>
-                </a:solidFill>
-                <a:latin typeface="微軟正黑體" pitchFamily="34" charset="-120"/>
-                <a:ea typeface="微軟正黑體" pitchFamily="34" charset="-120"/>
-              </a:rPr>
-              <a:t>生敬拜祢</a:t>
+              <a:t>一生敬拜祢  一生敬拜祢</a:t>
             </a:r>
             <a:endParaRPr lang="en-US" altLang="zh-TW" sz="6400" b="1" dirty="0">
               <a:solidFill>
@@ -4630,7 +4226,7 @@
                 <a:latin typeface="Microsoft JhengHei" panose="020B0604030504040204" pitchFamily="34" charset="-120"/>
                 <a:ea typeface="Microsoft JhengHei" panose="020B0604030504040204" pitchFamily="34" charset="-120"/>
               </a:rPr>
-              <a:t>副</a:t>
+              <a:t>副歌 </a:t>
             </a:r>
             <a:r>
               <a:rPr lang="en-US" sz="4267" b="1" dirty="0">
@@ -4640,7 +4236,7 @@
                 <a:latin typeface="Microsoft JhengHei" panose="020B0604030504040204" pitchFamily="34" charset="-120"/>
                 <a:ea typeface="Microsoft JhengHei" panose="020B0604030504040204" pitchFamily="34" charset="-120"/>
               </a:rPr>
-              <a:t> )</a:t>
+              <a:t>)</a:t>
             </a:r>
             <a:endParaRPr lang="vi-VN" sz="4267" b="1" dirty="0">
               <a:solidFill>
